--- a/Training Materials/20. Enterprise Data Engineering in JavaScript/Slides/02_Deep_Traversal_and_Recursive_Logic.pptx
+++ b/Training Materials/20. Enterprise Data Engineering in JavaScript/Slides/02_Deep_Traversal_and_Recursive_Logic.pptx
@@ -8059,8 +8059,8 @@
         </p:blipFill>
         <p:spPr bwMode="auto">
           <a:xfrm>
-            <a:off x="1123846" y="2105985"/>
-            <a:ext cx="9941259" cy="2659285"/>
+            <a:off x="1123846" y="1372581"/>
+            <a:ext cx="9941259" cy="4758396"/>
           </a:xfrm>
           <a:prstGeom prst="rect">
             <a:avLst/>
@@ -18006,7 +18006,7 @@
                         <a:buNone/>
                       </a:pPr>
                       <a:r>
-                        <a:rPr lang="en-IN" sz="1500">
+                        <a:rPr lang="en-IN" sz="1500" dirty="0" err="1">
                           <a:solidFill>
                             <a:schemeClr val="tx1">
                               <a:lumMod val="85000"/>
@@ -18016,7 +18016,98 @@
                           <a:effectLst/>
                           <a:latin typeface="Google Sans Text"/>
                         </a:rPr>
-                        <a:t>const fn = asset.priceFn; fn()</a:t>
+                        <a:t>const</a:t>
+                      </a:r>
+                      <a:r>
+                        <a:rPr lang="en-IN" sz="1500" dirty="0">
+                          <a:solidFill>
+                            <a:schemeClr val="tx1">
+                              <a:lumMod val="85000"/>
+                              <a:lumOff val="15000"/>
+                            </a:schemeClr>
+                          </a:solidFill>
+                          <a:effectLst/>
+                          <a:latin typeface="Google Sans Text"/>
+                        </a:rPr>
+                        <a:t> </a:t>
+                      </a:r>
+                      <a:r>
+                        <a:rPr lang="en-IN" sz="1500" dirty="0" err="1">
+                          <a:solidFill>
+                            <a:schemeClr val="tx1">
+                              <a:lumMod val="85000"/>
+                              <a:lumOff val="15000"/>
+                            </a:schemeClr>
+                          </a:solidFill>
+                          <a:effectLst/>
+                          <a:latin typeface="Google Sans Text"/>
+                        </a:rPr>
+                        <a:t>fn</a:t>
+                      </a:r>
+                      <a:r>
+                        <a:rPr lang="en-IN" sz="1500" dirty="0">
+                          <a:solidFill>
+                            <a:schemeClr val="tx1">
+                              <a:lumMod val="85000"/>
+                              <a:lumOff val="15000"/>
+                            </a:schemeClr>
+                          </a:solidFill>
+                          <a:effectLst/>
+                          <a:latin typeface="Google Sans Text"/>
+                        </a:rPr>
+                        <a:t> = </a:t>
+                      </a:r>
+                      <a:r>
+                        <a:rPr lang="en-IN" sz="1500" dirty="0" err="1">
+                          <a:solidFill>
+                            <a:schemeClr val="tx1">
+                              <a:lumMod val="85000"/>
+                              <a:lumOff val="15000"/>
+                            </a:schemeClr>
+                          </a:solidFill>
+                          <a:effectLst/>
+                          <a:latin typeface="Google Sans Text"/>
+                        </a:rPr>
+                        <a:t>asset.priceFn</a:t>
+                      </a:r>
+                      <a:r>
+                        <a:rPr lang="en-IN" sz="1500" dirty="0">
+                          <a:solidFill>
+                            <a:schemeClr val="tx1">
+                              <a:lumMod val="85000"/>
+                              <a:lumOff val="15000"/>
+                            </a:schemeClr>
+                          </a:solidFill>
+                          <a:effectLst/>
+                          <a:latin typeface="Google Sans Text"/>
+                        </a:rPr>
+                        <a:t>; </a:t>
+                      </a:r>
+                      <a:r>
+                        <a:rPr lang="en-IN" sz="1500" dirty="0" err="1">
+                          <a:solidFill>
+                            <a:schemeClr val="tx1">
+                              <a:lumMod val="85000"/>
+                              <a:lumOff val="15000"/>
+                            </a:schemeClr>
+                          </a:solidFill>
+                          <a:effectLst/>
+                          <a:latin typeface="Google Sans Text"/>
+                        </a:rPr>
+                        <a:t>fn</a:t>
+                      </a:r>
+                      <a:r>
+                        <a:rPr lang="en-IN" sz="1500" dirty="0">
+                          <a:solidFill>
+                            <a:schemeClr val="tx1">
+                              <a:lumMod val="85000"/>
+                              <a:lumOff val="15000"/>
+                            </a:schemeClr>
+                          </a:solidFill>
+                          <a:effectLst/>
+                          <a:latin typeface="Google Sans Text"/>
+                        </a:rPr>
+                        <a:t>()</a:t>
                       </a:r>
                     </a:p>
                   </a:txBody>
@@ -18061,7 +18152,7 @@
                         <a:buNone/>
                       </a:pPr>
                       <a:r>
-                        <a:rPr lang="en-IN" sz="1500" b="1">
+                        <a:rPr lang="en-IN" sz="1500" b="1" dirty="0">
                           <a:solidFill>
                             <a:schemeClr val="tx1">
                               <a:lumMod val="85000"/>
@@ -18074,7 +18165,7 @@
                         <a:t>Lost!</a:t>
                       </a:r>
                       <a:r>
-                        <a:rPr lang="en-IN" sz="1500">
+                        <a:rPr lang="en-IN" sz="1500" dirty="0">
                           <a:solidFill>
                             <a:schemeClr val="tx1">
                               <a:lumMod val="85000"/>
@@ -18195,7 +18286,7 @@
                         <a:buNone/>
                       </a:pPr>
                       <a:r>
-                        <a:rPr lang="en-IN" sz="1500">
+                        <a:rPr lang="en-IN" sz="1500" dirty="0" err="1">
                           <a:solidFill>
                             <a:schemeClr val="tx1">
                               <a:lumMod val="85000"/>
@@ -18205,7 +18296,20 @@
                           <a:effectLst/>
                           <a:latin typeface="Google Sans Text"/>
                         </a:rPr>
-                        <a:t>fn.call(asset)</a:t>
+                        <a:t>fn.call</a:t>
+                      </a:r>
+                      <a:r>
+                        <a:rPr lang="en-IN" sz="1500" dirty="0">
+                          <a:solidFill>
+                            <a:schemeClr val="tx1">
+                              <a:lumMod val="85000"/>
+                              <a:lumOff val="15000"/>
+                            </a:schemeClr>
+                          </a:solidFill>
+                          <a:effectLst/>
+                          <a:latin typeface="Google Sans Text"/>
+                        </a:rPr>
+                        <a:t>(asset)</a:t>
                       </a:r>
                     </a:p>
                   </a:txBody>
